--- a/episodes/03-first-mcp-server/slides/ep03-first-mcp-server.pptx
+++ b/episodes/03-first-mcp-server/slides/ep03-first-mcp-server.pptx
@@ -2197,8 +2197,8 @@
         </p:nvSpPr>
         <p:spPr>
           <a:xfrm>
-            <a:off x="548640" y="1143000"/>
-            <a:ext cx="8229600" cy="726440"/>
+            <a:off x="548640" y="1051560"/>
+            <a:ext cx="8229600" cy="782320"/>
           </a:xfrm>
           <a:prstGeom prst="rect">
             <a:avLst/>
@@ -2214,7 +2214,7 @@
               <a:buNone/>
             </a:pPr>
             <a:r>
-              <a:rPr lang="en-US" sz="4400" b="1" spc="-200" kern="0" dirty="0">
+              <a:rPr lang="en-US" sz="4400" b="1" spc="100" kern="0" dirty="0">
                 <a:solidFill>
                   <a:srgbClr val="FFFFFF"/>
                 </a:solidFill>
@@ -2222,13 +2222,13 @@
                 <a:ea typeface="Geist" pitchFamily="34" charset="-122"/>
                 <a:cs typeface="Geist" pitchFamily="34" charset="-120"/>
               </a:rPr>
-              <a:t>learn with </a:t>
-            </a:r>
-            <a:pPr indent="0" marL="0">
-              <a:buNone/>
-            </a:pPr>
-            <a:r>
-              <a:rPr lang="en-US" sz="4400" b="1" spc="-200" kern="0" dirty="0">
+              <a:t>learn  with  </a:t>
+            </a:r>
+            <a:pPr indent="0" marL="0">
+              <a:buNone/>
+            </a:pPr>
+            <a:r>
+              <a:rPr lang="en-US" sz="4400" b="1" spc="100" kern="0" dirty="0">
                 <a:solidFill>
                   <a:srgbClr val="FF5700"/>
                 </a:solidFill>
@@ -2242,7 +2242,7 @@
               <a:buNone/>
             </a:pPr>
             <a:r>
-              <a:rPr lang="en-US" sz="1800" b="1" spc="-200" kern="0" dirty="0">
+              <a:rPr lang="en-US" sz="1800" b="1" spc="100" kern="0" dirty="0">
                 <a:solidFill>
                   <a:srgbClr val="FF5700"/>
                 </a:solidFill>
@@ -2250,7 +2250,7 @@
                 <a:ea typeface="Geist" pitchFamily="34" charset="-122"/>
                 <a:cs typeface="Geist" pitchFamily="34" charset="-120"/>
               </a:rPr>
-              <a:t>■</a:t>
+              <a:t>  ■</a:t>
             </a:r>
             <a:endParaRPr lang="en-US" sz="4400" dirty="0"/>
           </a:p>
@@ -2264,7 +2264,7 @@
         </p:nvSpPr>
         <p:spPr>
           <a:xfrm>
-            <a:off x="548640" y="2057400"/>
+            <a:off x="548640" y="2194560"/>
             <a:ext cx="7680960" cy="1371600"/>
           </a:xfrm>
           <a:prstGeom prst="rect">
@@ -2505,8 +2505,8 @@
         </p:nvSpPr>
         <p:spPr>
           <a:xfrm>
-            <a:off x="457200" y="292608"/>
-            <a:ext cx="8229600" cy="231140"/>
+            <a:off x="457200" y="274320"/>
+            <a:ext cx="8229600" cy="248920"/>
           </a:xfrm>
           <a:prstGeom prst="rect">
             <a:avLst/>
@@ -2522,7 +2522,7 @@
               <a:buNone/>
             </a:pPr>
             <a:r>
-              <a:rPr lang="en-US" sz="1400" b="1" spc="-200" kern="0" dirty="0">
+              <a:rPr lang="en-US" sz="1400" b="1" spc="100" kern="0" dirty="0">
                 <a:solidFill>
                   <a:srgbClr val="1C1C1C"/>
                 </a:solidFill>
@@ -2530,13 +2530,13 @@
                 <a:ea typeface="Geist" pitchFamily="34" charset="-122"/>
                 <a:cs typeface="Geist" pitchFamily="34" charset="-120"/>
               </a:rPr>
-              <a:t>learn with </a:t>
-            </a:r>
-            <a:pPr indent="0" marL="0">
-              <a:buNone/>
-            </a:pPr>
-            <a:r>
-              <a:rPr lang="en-US" sz="1400" b="1" spc="-200" kern="0" dirty="0">
+              <a:t>learn  with  </a:t>
+            </a:r>
+            <a:pPr indent="0" marL="0">
+              <a:buNone/>
+            </a:pPr>
+            <a:r>
+              <a:rPr lang="en-US" sz="1400" b="1" spc="100" kern="0" dirty="0">
                 <a:solidFill>
                   <a:srgbClr val="FF5700"/>
                 </a:solidFill>
@@ -2550,7 +2550,7 @@
               <a:buNone/>
             </a:pPr>
             <a:r>
-              <a:rPr lang="en-US" sz="600" b="1" spc="-200" kern="0" dirty="0">
+              <a:rPr lang="en-US" sz="600" b="1" spc="100" kern="0" dirty="0">
                 <a:solidFill>
                   <a:srgbClr val="FF5700"/>
                 </a:solidFill>
@@ -2558,7 +2558,7 @@
                 <a:ea typeface="Geist" pitchFamily="34" charset="-122"/>
                 <a:cs typeface="Geist" pitchFamily="34" charset="-120"/>
               </a:rPr>
-              <a:t>■</a:t>
+              <a:t>  ■</a:t>
             </a:r>
             <a:endParaRPr lang="en-US" sz="1400" dirty="0"/>
           </a:p>
@@ -2572,7 +2572,7 @@
         </p:nvSpPr>
         <p:spPr>
           <a:xfrm>
-            <a:off x="457200" y="813816"/>
+            <a:off x="457200" y="905256"/>
             <a:ext cx="91440" cy="91440"/>
           </a:xfrm>
           <a:prstGeom prst="rect">
@@ -2592,7 +2592,7 @@
         </p:nvSpPr>
         <p:spPr>
           <a:xfrm>
-            <a:off x="621792" y="713232"/>
+            <a:off x="621792" y="804672"/>
             <a:ext cx="6400800" cy="292608"/>
           </a:xfrm>
           <a:prstGeom prst="rect">
@@ -2631,7 +2631,7 @@
         </p:nvSpPr>
         <p:spPr>
           <a:xfrm>
-            <a:off x="457200" y="987552"/>
+            <a:off x="457200" y="1078992"/>
             <a:ext cx="8229600" cy="640080"/>
           </a:xfrm>
           <a:prstGeom prst="rect">
@@ -3231,8 +3231,8 @@
         </p:nvSpPr>
         <p:spPr>
           <a:xfrm>
-            <a:off x="457200" y="292608"/>
-            <a:ext cx="8229600" cy="231140"/>
+            <a:off x="457200" y="274320"/>
+            <a:ext cx="8229600" cy="248920"/>
           </a:xfrm>
           <a:prstGeom prst="rect">
             <a:avLst/>
@@ -3248,7 +3248,7 @@
               <a:buNone/>
             </a:pPr>
             <a:r>
-              <a:rPr lang="en-US" sz="1400" b="1" spc="-200" kern="0" dirty="0">
+              <a:rPr lang="en-US" sz="1400" b="1" spc="100" kern="0" dirty="0">
                 <a:solidFill>
                   <a:srgbClr val="1C1C1C"/>
                 </a:solidFill>
@@ -3256,13 +3256,13 @@
                 <a:ea typeface="Geist" pitchFamily="34" charset="-122"/>
                 <a:cs typeface="Geist" pitchFamily="34" charset="-120"/>
               </a:rPr>
-              <a:t>learn with </a:t>
-            </a:r>
-            <a:pPr indent="0" marL="0">
-              <a:buNone/>
-            </a:pPr>
-            <a:r>
-              <a:rPr lang="en-US" sz="1400" b="1" spc="-200" kern="0" dirty="0">
+              <a:t>learn  with  </a:t>
+            </a:r>
+            <a:pPr indent="0" marL="0">
+              <a:buNone/>
+            </a:pPr>
+            <a:r>
+              <a:rPr lang="en-US" sz="1400" b="1" spc="100" kern="0" dirty="0">
                 <a:solidFill>
                   <a:srgbClr val="FF5700"/>
                 </a:solidFill>
@@ -3276,7 +3276,7 @@
               <a:buNone/>
             </a:pPr>
             <a:r>
-              <a:rPr lang="en-US" sz="600" b="1" spc="-200" kern="0" dirty="0">
+              <a:rPr lang="en-US" sz="600" b="1" spc="100" kern="0" dirty="0">
                 <a:solidFill>
                   <a:srgbClr val="FF5700"/>
                 </a:solidFill>
@@ -3284,7 +3284,7 @@
                 <a:ea typeface="Geist" pitchFamily="34" charset="-122"/>
                 <a:cs typeface="Geist" pitchFamily="34" charset="-120"/>
               </a:rPr>
-              <a:t>■</a:t>
+              <a:t>  ■</a:t>
             </a:r>
             <a:endParaRPr lang="en-US" sz="1400" dirty="0"/>
           </a:p>
@@ -3298,7 +3298,7 @@
         </p:nvSpPr>
         <p:spPr>
           <a:xfrm>
-            <a:off x="457200" y="813816"/>
+            <a:off x="457200" y="905256"/>
             <a:ext cx="91440" cy="91440"/>
           </a:xfrm>
           <a:prstGeom prst="rect">
@@ -3318,7 +3318,7 @@
         </p:nvSpPr>
         <p:spPr>
           <a:xfrm>
-            <a:off x="621792" y="713232"/>
+            <a:off x="621792" y="804672"/>
             <a:ext cx="6400800" cy="292608"/>
           </a:xfrm>
           <a:prstGeom prst="rect">
@@ -3357,7 +3357,7 @@
         </p:nvSpPr>
         <p:spPr>
           <a:xfrm>
-            <a:off x="457200" y="987552"/>
+            <a:off x="457200" y="1078992"/>
             <a:ext cx="8229600" cy="640080"/>
           </a:xfrm>
           <a:prstGeom prst="rect">
@@ -3844,8 +3844,8 @@
         </p:nvSpPr>
         <p:spPr>
           <a:xfrm>
-            <a:off x="457200" y="292608"/>
-            <a:ext cx="8229600" cy="231140"/>
+            <a:off x="457200" y="274320"/>
+            <a:ext cx="8229600" cy="248920"/>
           </a:xfrm>
           <a:prstGeom prst="rect">
             <a:avLst/>
@@ -3861,7 +3861,7 @@
               <a:buNone/>
             </a:pPr>
             <a:r>
-              <a:rPr lang="en-US" sz="1400" b="1" spc="-200" kern="0" dirty="0">
+              <a:rPr lang="en-US" sz="1400" b="1" spc="100" kern="0" dirty="0">
                 <a:solidFill>
                   <a:srgbClr val="1C1C1C"/>
                 </a:solidFill>
@@ -3869,13 +3869,13 @@
                 <a:ea typeface="Geist" pitchFamily="34" charset="-122"/>
                 <a:cs typeface="Geist" pitchFamily="34" charset="-120"/>
               </a:rPr>
-              <a:t>learn with </a:t>
-            </a:r>
-            <a:pPr indent="0" marL="0">
-              <a:buNone/>
-            </a:pPr>
-            <a:r>
-              <a:rPr lang="en-US" sz="1400" b="1" spc="-200" kern="0" dirty="0">
+              <a:t>learn  with  </a:t>
+            </a:r>
+            <a:pPr indent="0" marL="0">
+              <a:buNone/>
+            </a:pPr>
+            <a:r>
+              <a:rPr lang="en-US" sz="1400" b="1" spc="100" kern="0" dirty="0">
                 <a:solidFill>
                   <a:srgbClr val="FF5700"/>
                 </a:solidFill>
@@ -3889,7 +3889,7 @@
               <a:buNone/>
             </a:pPr>
             <a:r>
-              <a:rPr lang="en-US" sz="600" b="1" spc="-200" kern="0" dirty="0">
+              <a:rPr lang="en-US" sz="600" b="1" spc="100" kern="0" dirty="0">
                 <a:solidFill>
                   <a:srgbClr val="FF5700"/>
                 </a:solidFill>
@@ -3897,7 +3897,7 @@
                 <a:ea typeface="Geist" pitchFamily="34" charset="-122"/>
                 <a:cs typeface="Geist" pitchFamily="34" charset="-120"/>
               </a:rPr>
-              <a:t>■</a:t>
+              <a:t>  ■</a:t>
             </a:r>
             <a:endParaRPr lang="en-US" sz="1400" dirty="0"/>
           </a:p>
@@ -3911,7 +3911,7 @@
         </p:nvSpPr>
         <p:spPr>
           <a:xfrm>
-            <a:off x="457200" y="813816"/>
+            <a:off x="457200" y="905256"/>
             <a:ext cx="91440" cy="91440"/>
           </a:xfrm>
           <a:prstGeom prst="rect">
@@ -3931,7 +3931,7 @@
         </p:nvSpPr>
         <p:spPr>
           <a:xfrm>
-            <a:off x="621792" y="713232"/>
+            <a:off x="621792" y="804672"/>
             <a:ext cx="6400800" cy="292608"/>
           </a:xfrm>
           <a:prstGeom prst="rect">
@@ -3970,7 +3970,7 @@
         </p:nvSpPr>
         <p:spPr>
           <a:xfrm>
-            <a:off x="457200" y="987552"/>
+            <a:off x="457200" y="1078992"/>
             <a:ext cx="8229600" cy="640080"/>
           </a:xfrm>
           <a:prstGeom prst="rect">
@@ -4774,8 +4774,8 @@
         </p:nvSpPr>
         <p:spPr>
           <a:xfrm>
-            <a:off x="548640" y="411480"/>
-            <a:ext cx="8229600" cy="297180"/>
+            <a:off x="548640" y="384048"/>
+            <a:ext cx="8229600" cy="320040"/>
           </a:xfrm>
           <a:prstGeom prst="rect">
             <a:avLst/>
@@ -4791,7 +4791,7 @@
               <a:buNone/>
             </a:pPr>
             <a:r>
-              <a:rPr lang="en-US" sz="1800" b="1" spc="-200" kern="0" dirty="0">
+              <a:rPr lang="en-US" sz="1800" b="1" spc="100" kern="0" dirty="0">
                 <a:solidFill>
                   <a:srgbClr val="FFFFFF"/>
                 </a:solidFill>
@@ -4799,13 +4799,13 @@
                 <a:ea typeface="Geist" pitchFamily="34" charset="-122"/>
                 <a:cs typeface="Geist" pitchFamily="34" charset="-120"/>
               </a:rPr>
-              <a:t>learn with </a:t>
-            </a:r>
-            <a:pPr indent="0" marL="0">
-              <a:buNone/>
-            </a:pPr>
-            <a:r>
-              <a:rPr lang="en-US" sz="1800" b="1" spc="-200" kern="0" dirty="0">
+              <a:t>learn  with  </a:t>
+            </a:r>
+            <a:pPr indent="0" marL="0">
+              <a:buNone/>
+            </a:pPr>
+            <a:r>
+              <a:rPr lang="en-US" sz="1800" b="1" spc="100" kern="0" dirty="0">
                 <a:solidFill>
                   <a:srgbClr val="FF5700"/>
                 </a:solidFill>
@@ -4819,7 +4819,7 @@
               <a:buNone/>
             </a:pPr>
             <a:r>
-              <a:rPr lang="en-US" sz="800" b="1" spc="-200" kern="0" dirty="0">
+              <a:rPr lang="en-US" sz="700" b="1" spc="100" kern="0" dirty="0">
                 <a:solidFill>
                   <a:srgbClr val="FF5700"/>
                 </a:solidFill>
@@ -4827,7 +4827,7 @@
                 <a:ea typeface="Geist" pitchFamily="34" charset="-122"/>
                 <a:cs typeface="Geist" pitchFamily="34" charset="-120"/>
               </a:rPr>
-              <a:t>■</a:t>
+              <a:t>  ■</a:t>
             </a:r>
             <a:endParaRPr lang="en-US" sz="1800" dirty="0"/>
           </a:p>
@@ -5526,8 +5526,8 @@
         </p:nvSpPr>
         <p:spPr>
           <a:xfrm>
-            <a:off x="457200" y="292608"/>
-            <a:ext cx="8229600" cy="231140"/>
+            <a:off x="457200" y="274320"/>
+            <a:ext cx="8229600" cy="248920"/>
           </a:xfrm>
           <a:prstGeom prst="rect">
             <a:avLst/>
@@ -5543,7 +5543,7 @@
               <a:buNone/>
             </a:pPr>
             <a:r>
-              <a:rPr lang="en-US" sz="1400" b="1" spc="-200" kern="0" dirty="0">
+              <a:rPr lang="en-US" sz="1400" b="1" spc="100" kern="0" dirty="0">
                 <a:solidFill>
                   <a:srgbClr val="1C1C1C"/>
                 </a:solidFill>
@@ -5551,13 +5551,13 @@
                 <a:ea typeface="Geist" pitchFamily="34" charset="-122"/>
                 <a:cs typeface="Geist" pitchFamily="34" charset="-120"/>
               </a:rPr>
-              <a:t>learn with </a:t>
-            </a:r>
-            <a:pPr indent="0" marL="0">
-              <a:buNone/>
-            </a:pPr>
-            <a:r>
-              <a:rPr lang="en-US" sz="1400" b="1" spc="-200" kern="0" dirty="0">
+              <a:t>learn  with  </a:t>
+            </a:r>
+            <a:pPr indent="0" marL="0">
+              <a:buNone/>
+            </a:pPr>
+            <a:r>
+              <a:rPr lang="en-US" sz="1400" b="1" spc="100" kern="0" dirty="0">
                 <a:solidFill>
                   <a:srgbClr val="FF5700"/>
                 </a:solidFill>
@@ -5571,7 +5571,7 @@
               <a:buNone/>
             </a:pPr>
             <a:r>
-              <a:rPr lang="en-US" sz="600" b="1" spc="-200" kern="0" dirty="0">
+              <a:rPr lang="en-US" sz="600" b="1" spc="100" kern="0" dirty="0">
                 <a:solidFill>
                   <a:srgbClr val="FF5700"/>
                 </a:solidFill>
@@ -5579,7 +5579,7 @@
                 <a:ea typeface="Geist" pitchFamily="34" charset="-122"/>
                 <a:cs typeface="Geist" pitchFamily="34" charset="-120"/>
               </a:rPr>
-              <a:t>■</a:t>
+              <a:t>  ■</a:t>
             </a:r>
             <a:endParaRPr lang="en-US" sz="1400" dirty="0"/>
           </a:p>
@@ -5593,7 +5593,7 @@
         </p:nvSpPr>
         <p:spPr>
           <a:xfrm>
-            <a:off x="457200" y="813816"/>
+            <a:off x="457200" y="905256"/>
             <a:ext cx="91440" cy="91440"/>
           </a:xfrm>
           <a:prstGeom prst="rect">
@@ -5613,7 +5613,7 @@
         </p:nvSpPr>
         <p:spPr>
           <a:xfrm>
-            <a:off x="621792" y="713232"/>
+            <a:off x="621792" y="804672"/>
             <a:ext cx="6400800" cy="292608"/>
           </a:xfrm>
           <a:prstGeom prst="rect">
@@ -5652,7 +5652,7 @@
         </p:nvSpPr>
         <p:spPr>
           <a:xfrm>
-            <a:off x="457200" y="987552"/>
+            <a:off x="457200" y="1078992"/>
             <a:ext cx="8229600" cy="640080"/>
           </a:xfrm>
           <a:prstGeom prst="rect">
@@ -6372,8 +6372,8 @@
         </p:nvSpPr>
         <p:spPr>
           <a:xfrm>
-            <a:off x="457200" y="292608"/>
-            <a:ext cx="8229600" cy="231140"/>
+            <a:off x="457200" y="274320"/>
+            <a:ext cx="8229600" cy="248920"/>
           </a:xfrm>
           <a:prstGeom prst="rect">
             <a:avLst/>
@@ -6389,7 +6389,7 @@
               <a:buNone/>
             </a:pPr>
             <a:r>
-              <a:rPr lang="en-US" sz="1400" b="1" spc="-200" kern="0" dirty="0">
+              <a:rPr lang="en-US" sz="1400" b="1" spc="100" kern="0" dirty="0">
                 <a:solidFill>
                   <a:srgbClr val="1C1C1C"/>
                 </a:solidFill>
@@ -6397,13 +6397,13 @@
                 <a:ea typeface="Geist" pitchFamily="34" charset="-122"/>
                 <a:cs typeface="Geist" pitchFamily="34" charset="-120"/>
               </a:rPr>
-              <a:t>learn with </a:t>
-            </a:r>
-            <a:pPr indent="0" marL="0">
-              <a:buNone/>
-            </a:pPr>
-            <a:r>
-              <a:rPr lang="en-US" sz="1400" b="1" spc="-200" kern="0" dirty="0">
+              <a:t>learn  with  </a:t>
+            </a:r>
+            <a:pPr indent="0" marL="0">
+              <a:buNone/>
+            </a:pPr>
+            <a:r>
+              <a:rPr lang="en-US" sz="1400" b="1" spc="100" kern="0" dirty="0">
                 <a:solidFill>
                   <a:srgbClr val="FF5700"/>
                 </a:solidFill>
@@ -6417,7 +6417,7 @@
               <a:buNone/>
             </a:pPr>
             <a:r>
-              <a:rPr lang="en-US" sz="600" b="1" spc="-200" kern="0" dirty="0">
+              <a:rPr lang="en-US" sz="600" b="1" spc="100" kern="0" dirty="0">
                 <a:solidFill>
                   <a:srgbClr val="FF5700"/>
                 </a:solidFill>
@@ -6425,7 +6425,7 @@
                 <a:ea typeface="Geist" pitchFamily="34" charset="-122"/>
                 <a:cs typeface="Geist" pitchFamily="34" charset="-120"/>
               </a:rPr>
-              <a:t>■</a:t>
+              <a:t>  ■</a:t>
             </a:r>
             <a:endParaRPr lang="en-US" sz="1400" dirty="0"/>
           </a:p>
@@ -6439,7 +6439,7 @@
         </p:nvSpPr>
         <p:spPr>
           <a:xfrm>
-            <a:off x="457200" y="813816"/>
+            <a:off x="457200" y="905256"/>
             <a:ext cx="91440" cy="91440"/>
           </a:xfrm>
           <a:prstGeom prst="rect">
@@ -6459,7 +6459,7 @@
         </p:nvSpPr>
         <p:spPr>
           <a:xfrm>
-            <a:off x="621792" y="713232"/>
+            <a:off x="621792" y="804672"/>
             <a:ext cx="6400800" cy="292608"/>
           </a:xfrm>
           <a:prstGeom prst="rect">
@@ -6498,7 +6498,7 @@
         </p:nvSpPr>
         <p:spPr>
           <a:xfrm>
-            <a:off x="457200" y="987552"/>
+            <a:off x="457200" y="1078992"/>
             <a:ext cx="8229600" cy="640080"/>
           </a:xfrm>
           <a:prstGeom prst="rect">
@@ -7987,8 +7987,8 @@
         </p:nvSpPr>
         <p:spPr>
           <a:xfrm>
-            <a:off x="457200" y="292608"/>
-            <a:ext cx="8229600" cy="231140"/>
+            <a:off x="457200" y="274320"/>
+            <a:ext cx="8229600" cy="248920"/>
           </a:xfrm>
           <a:prstGeom prst="rect">
             <a:avLst/>
@@ -8004,7 +8004,7 @@
               <a:buNone/>
             </a:pPr>
             <a:r>
-              <a:rPr lang="en-US" sz="1400" b="1" spc="-200" kern="0" dirty="0">
+              <a:rPr lang="en-US" sz="1400" b="1" spc="100" kern="0" dirty="0">
                 <a:solidFill>
                   <a:srgbClr val="1C1C1C"/>
                 </a:solidFill>
@@ -8012,13 +8012,13 @@
                 <a:ea typeface="Geist" pitchFamily="34" charset="-122"/>
                 <a:cs typeface="Geist" pitchFamily="34" charset="-120"/>
               </a:rPr>
-              <a:t>learn with </a:t>
-            </a:r>
-            <a:pPr indent="0" marL="0">
-              <a:buNone/>
-            </a:pPr>
-            <a:r>
-              <a:rPr lang="en-US" sz="1400" b="1" spc="-200" kern="0" dirty="0">
+              <a:t>learn  with  </a:t>
+            </a:r>
+            <a:pPr indent="0" marL="0">
+              <a:buNone/>
+            </a:pPr>
+            <a:r>
+              <a:rPr lang="en-US" sz="1400" b="1" spc="100" kern="0" dirty="0">
                 <a:solidFill>
                   <a:srgbClr val="FF5700"/>
                 </a:solidFill>
@@ -8032,7 +8032,7 @@
               <a:buNone/>
             </a:pPr>
             <a:r>
-              <a:rPr lang="en-US" sz="600" b="1" spc="-200" kern="0" dirty="0">
+              <a:rPr lang="en-US" sz="600" b="1" spc="100" kern="0" dirty="0">
                 <a:solidFill>
                   <a:srgbClr val="FF5700"/>
                 </a:solidFill>
@@ -8040,7 +8040,7 @@
                 <a:ea typeface="Geist" pitchFamily="34" charset="-122"/>
                 <a:cs typeface="Geist" pitchFamily="34" charset="-120"/>
               </a:rPr>
-              <a:t>■</a:t>
+              <a:t>  ■</a:t>
             </a:r>
             <a:endParaRPr lang="en-US" sz="1400" dirty="0"/>
           </a:p>
@@ -8054,7 +8054,7 @@
         </p:nvSpPr>
         <p:spPr>
           <a:xfrm>
-            <a:off x="457200" y="813816"/>
+            <a:off x="457200" y="905256"/>
             <a:ext cx="91440" cy="91440"/>
           </a:xfrm>
           <a:prstGeom prst="rect">
@@ -8074,7 +8074,7 @@
         </p:nvSpPr>
         <p:spPr>
           <a:xfrm>
-            <a:off x="621792" y="713232"/>
+            <a:off x="621792" y="804672"/>
             <a:ext cx="6400800" cy="292608"/>
           </a:xfrm>
           <a:prstGeom prst="rect">
@@ -8113,7 +8113,7 @@
         </p:nvSpPr>
         <p:spPr>
           <a:xfrm>
-            <a:off x="457200" y="987552"/>
+            <a:off x="457200" y="1078992"/>
             <a:ext cx="8229600" cy="640080"/>
           </a:xfrm>
           <a:prstGeom prst="rect">
@@ -9104,8 +9104,8 @@
         </p:nvSpPr>
         <p:spPr>
           <a:xfrm>
-            <a:off x="457200" y="292608"/>
-            <a:ext cx="8229600" cy="231140"/>
+            <a:off x="457200" y="274320"/>
+            <a:ext cx="8229600" cy="248920"/>
           </a:xfrm>
           <a:prstGeom prst="rect">
             <a:avLst/>
@@ -9121,7 +9121,7 @@
               <a:buNone/>
             </a:pPr>
             <a:r>
-              <a:rPr lang="en-US" sz="1400" b="1" spc="-200" kern="0" dirty="0">
+              <a:rPr lang="en-US" sz="1400" b="1" spc="100" kern="0" dirty="0">
                 <a:solidFill>
                   <a:srgbClr val="1C1C1C"/>
                 </a:solidFill>
@@ -9129,13 +9129,13 @@
                 <a:ea typeface="Geist" pitchFamily="34" charset="-122"/>
                 <a:cs typeface="Geist" pitchFamily="34" charset="-120"/>
               </a:rPr>
-              <a:t>learn with </a:t>
-            </a:r>
-            <a:pPr indent="0" marL="0">
-              <a:buNone/>
-            </a:pPr>
-            <a:r>
-              <a:rPr lang="en-US" sz="1400" b="1" spc="-200" kern="0" dirty="0">
+              <a:t>learn  with  </a:t>
+            </a:r>
+            <a:pPr indent="0" marL="0">
+              <a:buNone/>
+            </a:pPr>
+            <a:r>
+              <a:rPr lang="en-US" sz="1400" b="1" spc="100" kern="0" dirty="0">
                 <a:solidFill>
                   <a:srgbClr val="FF5700"/>
                 </a:solidFill>
@@ -9149,7 +9149,7 @@
               <a:buNone/>
             </a:pPr>
             <a:r>
-              <a:rPr lang="en-US" sz="600" b="1" spc="-200" kern="0" dirty="0">
+              <a:rPr lang="en-US" sz="600" b="1" spc="100" kern="0" dirty="0">
                 <a:solidFill>
                   <a:srgbClr val="FF5700"/>
                 </a:solidFill>
@@ -9157,7 +9157,7 @@
                 <a:ea typeface="Geist" pitchFamily="34" charset="-122"/>
                 <a:cs typeface="Geist" pitchFamily="34" charset="-120"/>
               </a:rPr>
-              <a:t>■</a:t>
+              <a:t>  ■</a:t>
             </a:r>
             <a:endParaRPr lang="en-US" sz="1400" dirty="0"/>
           </a:p>
@@ -9171,7 +9171,7 @@
         </p:nvSpPr>
         <p:spPr>
           <a:xfrm>
-            <a:off x="457200" y="813816"/>
+            <a:off x="457200" y="905256"/>
             <a:ext cx="91440" cy="91440"/>
           </a:xfrm>
           <a:prstGeom prst="rect">
@@ -9191,7 +9191,7 @@
         </p:nvSpPr>
         <p:spPr>
           <a:xfrm>
-            <a:off x="621792" y="713232"/>
+            <a:off x="621792" y="804672"/>
             <a:ext cx="6400800" cy="292608"/>
           </a:xfrm>
           <a:prstGeom prst="rect">
@@ -9230,7 +9230,7 @@
         </p:nvSpPr>
         <p:spPr>
           <a:xfrm>
-            <a:off x="457200" y="987552"/>
+            <a:off x="457200" y="1078992"/>
             <a:ext cx="8229600" cy="640080"/>
           </a:xfrm>
           <a:prstGeom prst="rect">
@@ -9950,8 +9950,8 @@
         </p:nvSpPr>
         <p:spPr>
           <a:xfrm>
-            <a:off x="457200" y="292608"/>
-            <a:ext cx="8229600" cy="231140"/>
+            <a:off x="457200" y="274320"/>
+            <a:ext cx="8229600" cy="248920"/>
           </a:xfrm>
           <a:prstGeom prst="rect">
             <a:avLst/>
@@ -9967,7 +9967,7 @@
               <a:buNone/>
             </a:pPr>
             <a:r>
-              <a:rPr lang="en-US" sz="1400" b="1" spc="-200" kern="0" dirty="0">
+              <a:rPr lang="en-US" sz="1400" b="1" spc="100" kern="0" dirty="0">
                 <a:solidFill>
                   <a:srgbClr val="1C1C1C"/>
                 </a:solidFill>
@@ -9975,13 +9975,13 @@
                 <a:ea typeface="Geist" pitchFamily="34" charset="-122"/>
                 <a:cs typeface="Geist" pitchFamily="34" charset="-120"/>
               </a:rPr>
-              <a:t>learn with </a:t>
-            </a:r>
-            <a:pPr indent="0" marL="0">
-              <a:buNone/>
-            </a:pPr>
-            <a:r>
-              <a:rPr lang="en-US" sz="1400" b="1" spc="-200" kern="0" dirty="0">
+              <a:t>learn  with  </a:t>
+            </a:r>
+            <a:pPr indent="0" marL="0">
+              <a:buNone/>
+            </a:pPr>
+            <a:r>
+              <a:rPr lang="en-US" sz="1400" b="1" spc="100" kern="0" dirty="0">
                 <a:solidFill>
                   <a:srgbClr val="FF5700"/>
                 </a:solidFill>
@@ -9995,7 +9995,7 @@
               <a:buNone/>
             </a:pPr>
             <a:r>
-              <a:rPr lang="en-US" sz="600" b="1" spc="-200" kern="0" dirty="0">
+              <a:rPr lang="en-US" sz="600" b="1" spc="100" kern="0" dirty="0">
                 <a:solidFill>
                   <a:srgbClr val="FF5700"/>
                 </a:solidFill>
@@ -10003,7 +10003,7 @@
                 <a:ea typeface="Geist" pitchFamily="34" charset="-122"/>
                 <a:cs typeface="Geist" pitchFamily="34" charset="-120"/>
               </a:rPr>
-              <a:t>■</a:t>
+              <a:t>  ■</a:t>
             </a:r>
             <a:endParaRPr lang="en-US" sz="1400" dirty="0"/>
           </a:p>
@@ -10017,7 +10017,7 @@
         </p:nvSpPr>
         <p:spPr>
           <a:xfrm>
-            <a:off x="457200" y="813816"/>
+            <a:off x="457200" y="905256"/>
             <a:ext cx="91440" cy="91440"/>
           </a:xfrm>
           <a:prstGeom prst="rect">
@@ -10037,7 +10037,7 @@
         </p:nvSpPr>
         <p:spPr>
           <a:xfrm>
-            <a:off x="621792" y="713232"/>
+            <a:off x="621792" y="804672"/>
             <a:ext cx="6400800" cy="292608"/>
           </a:xfrm>
           <a:prstGeom prst="rect">
@@ -10076,7 +10076,7 @@
         </p:nvSpPr>
         <p:spPr>
           <a:xfrm>
-            <a:off x="457200" y="987552"/>
+            <a:off x="457200" y="1078992"/>
             <a:ext cx="8229600" cy="640080"/>
           </a:xfrm>
           <a:prstGeom prst="rect">
@@ -11064,8 +11064,8 @@
         </p:nvSpPr>
         <p:spPr>
           <a:xfrm>
-            <a:off x="457200" y="292608"/>
-            <a:ext cx="8229600" cy="231140"/>
+            <a:off x="457200" y="274320"/>
+            <a:ext cx="8229600" cy="248920"/>
           </a:xfrm>
           <a:prstGeom prst="rect">
             <a:avLst/>
@@ -11081,7 +11081,7 @@
               <a:buNone/>
             </a:pPr>
             <a:r>
-              <a:rPr lang="en-US" sz="1400" b="1" spc="-200" kern="0" dirty="0">
+              <a:rPr lang="en-US" sz="1400" b="1" spc="100" kern="0" dirty="0">
                 <a:solidFill>
                   <a:srgbClr val="1C1C1C"/>
                 </a:solidFill>
@@ -11089,13 +11089,13 @@
                 <a:ea typeface="Geist" pitchFamily="34" charset="-122"/>
                 <a:cs typeface="Geist" pitchFamily="34" charset="-120"/>
               </a:rPr>
-              <a:t>learn with </a:t>
-            </a:r>
-            <a:pPr indent="0" marL="0">
-              <a:buNone/>
-            </a:pPr>
-            <a:r>
-              <a:rPr lang="en-US" sz="1400" b="1" spc="-200" kern="0" dirty="0">
+              <a:t>learn  with  </a:t>
+            </a:r>
+            <a:pPr indent="0" marL="0">
+              <a:buNone/>
+            </a:pPr>
+            <a:r>
+              <a:rPr lang="en-US" sz="1400" b="1" spc="100" kern="0" dirty="0">
                 <a:solidFill>
                   <a:srgbClr val="FF5700"/>
                 </a:solidFill>
@@ -11109,7 +11109,7 @@
               <a:buNone/>
             </a:pPr>
             <a:r>
-              <a:rPr lang="en-US" sz="600" b="1" spc="-200" kern="0" dirty="0">
+              <a:rPr lang="en-US" sz="600" b="1" spc="100" kern="0" dirty="0">
                 <a:solidFill>
                   <a:srgbClr val="FF5700"/>
                 </a:solidFill>
@@ -11117,7 +11117,7 @@
                 <a:ea typeface="Geist" pitchFamily="34" charset="-122"/>
                 <a:cs typeface="Geist" pitchFamily="34" charset="-120"/>
               </a:rPr>
-              <a:t>■</a:t>
+              <a:t>  ■</a:t>
             </a:r>
             <a:endParaRPr lang="en-US" sz="1400" dirty="0"/>
           </a:p>
@@ -11131,7 +11131,7 @@
         </p:nvSpPr>
         <p:spPr>
           <a:xfrm>
-            <a:off x="457200" y="813816"/>
+            <a:off x="457200" y="905256"/>
             <a:ext cx="91440" cy="91440"/>
           </a:xfrm>
           <a:prstGeom prst="rect">
@@ -11151,7 +11151,7 @@
         </p:nvSpPr>
         <p:spPr>
           <a:xfrm>
-            <a:off x="621792" y="713232"/>
+            <a:off x="621792" y="804672"/>
             <a:ext cx="6400800" cy="292608"/>
           </a:xfrm>
           <a:prstGeom prst="rect">
@@ -11190,7 +11190,7 @@
         </p:nvSpPr>
         <p:spPr>
           <a:xfrm>
-            <a:off x="457200" y="987552"/>
+            <a:off x="457200" y="1078992"/>
             <a:ext cx="8229600" cy="640080"/>
           </a:xfrm>
           <a:prstGeom prst="rect">
@@ -11764,8 +11764,8 @@
         </p:nvSpPr>
         <p:spPr>
           <a:xfrm>
-            <a:off x="457200" y="292608"/>
-            <a:ext cx="8229600" cy="231140"/>
+            <a:off x="457200" y="274320"/>
+            <a:ext cx="8229600" cy="248920"/>
           </a:xfrm>
           <a:prstGeom prst="rect">
             <a:avLst/>
@@ -11781,7 +11781,7 @@
               <a:buNone/>
             </a:pPr>
             <a:r>
-              <a:rPr lang="en-US" sz="1400" b="1" spc="-200" kern="0" dirty="0">
+              <a:rPr lang="en-US" sz="1400" b="1" spc="100" kern="0" dirty="0">
                 <a:solidFill>
                   <a:srgbClr val="1C1C1C"/>
                 </a:solidFill>
@@ -11789,13 +11789,13 @@
                 <a:ea typeface="Geist" pitchFamily="34" charset="-122"/>
                 <a:cs typeface="Geist" pitchFamily="34" charset="-120"/>
               </a:rPr>
-              <a:t>learn with </a:t>
-            </a:r>
-            <a:pPr indent="0" marL="0">
-              <a:buNone/>
-            </a:pPr>
-            <a:r>
-              <a:rPr lang="en-US" sz="1400" b="1" spc="-200" kern="0" dirty="0">
+              <a:t>learn  with  </a:t>
+            </a:r>
+            <a:pPr indent="0" marL="0">
+              <a:buNone/>
+            </a:pPr>
+            <a:r>
+              <a:rPr lang="en-US" sz="1400" b="1" spc="100" kern="0" dirty="0">
                 <a:solidFill>
                   <a:srgbClr val="FF5700"/>
                 </a:solidFill>
@@ -11809,7 +11809,7 @@
               <a:buNone/>
             </a:pPr>
             <a:r>
-              <a:rPr lang="en-US" sz="600" b="1" spc="-200" kern="0" dirty="0">
+              <a:rPr lang="en-US" sz="600" b="1" spc="100" kern="0" dirty="0">
                 <a:solidFill>
                   <a:srgbClr val="FF5700"/>
                 </a:solidFill>
@@ -11817,7 +11817,7 @@
                 <a:ea typeface="Geist" pitchFamily="34" charset="-122"/>
                 <a:cs typeface="Geist" pitchFamily="34" charset="-120"/>
               </a:rPr>
-              <a:t>■</a:t>
+              <a:t>  ■</a:t>
             </a:r>
             <a:endParaRPr lang="en-US" sz="1400" dirty="0"/>
           </a:p>
@@ -11831,7 +11831,7 @@
         </p:nvSpPr>
         <p:spPr>
           <a:xfrm>
-            <a:off x="457200" y="813816"/>
+            <a:off x="457200" y="905256"/>
             <a:ext cx="91440" cy="91440"/>
           </a:xfrm>
           <a:prstGeom prst="rect">
@@ -11851,7 +11851,7 @@
         </p:nvSpPr>
         <p:spPr>
           <a:xfrm>
-            <a:off x="621792" y="713232"/>
+            <a:off x="621792" y="804672"/>
             <a:ext cx="6400800" cy="292608"/>
           </a:xfrm>
           <a:prstGeom prst="rect">
@@ -11890,7 +11890,7 @@
         </p:nvSpPr>
         <p:spPr>
           <a:xfrm>
-            <a:off x="457200" y="987552"/>
+            <a:off x="457200" y="1078992"/>
             <a:ext cx="8229600" cy="640080"/>
           </a:xfrm>
           <a:prstGeom prst="rect">
@@ -12566,8 +12566,8 @@
         </p:nvSpPr>
         <p:spPr>
           <a:xfrm>
-            <a:off x="457200" y="292608"/>
-            <a:ext cx="8229600" cy="231140"/>
+            <a:off x="457200" y="274320"/>
+            <a:ext cx="8229600" cy="248920"/>
           </a:xfrm>
           <a:prstGeom prst="rect">
             <a:avLst/>
@@ -12583,7 +12583,7 @@
               <a:buNone/>
             </a:pPr>
             <a:r>
-              <a:rPr lang="en-US" sz="1400" b="1" spc="-200" kern="0" dirty="0">
+              <a:rPr lang="en-US" sz="1400" b="1" spc="100" kern="0" dirty="0">
                 <a:solidFill>
                   <a:srgbClr val="1C1C1C"/>
                 </a:solidFill>
@@ -12591,13 +12591,13 @@
                 <a:ea typeface="Geist" pitchFamily="34" charset="-122"/>
                 <a:cs typeface="Geist" pitchFamily="34" charset="-120"/>
               </a:rPr>
-              <a:t>learn with </a:t>
-            </a:r>
-            <a:pPr indent="0" marL="0">
-              <a:buNone/>
-            </a:pPr>
-            <a:r>
-              <a:rPr lang="en-US" sz="1400" b="1" spc="-200" kern="0" dirty="0">
+              <a:t>learn  with  </a:t>
+            </a:r>
+            <a:pPr indent="0" marL="0">
+              <a:buNone/>
+            </a:pPr>
+            <a:r>
+              <a:rPr lang="en-US" sz="1400" b="1" spc="100" kern="0" dirty="0">
                 <a:solidFill>
                   <a:srgbClr val="FF5700"/>
                 </a:solidFill>
@@ -12611,7 +12611,7 @@
               <a:buNone/>
             </a:pPr>
             <a:r>
-              <a:rPr lang="en-US" sz="600" b="1" spc="-200" kern="0" dirty="0">
+              <a:rPr lang="en-US" sz="600" b="1" spc="100" kern="0" dirty="0">
                 <a:solidFill>
                   <a:srgbClr val="FF5700"/>
                 </a:solidFill>
@@ -12619,7 +12619,7 @@
                 <a:ea typeface="Geist" pitchFamily="34" charset="-122"/>
                 <a:cs typeface="Geist" pitchFamily="34" charset="-120"/>
               </a:rPr>
-              <a:t>■</a:t>
+              <a:t>  ■</a:t>
             </a:r>
             <a:endParaRPr lang="en-US" sz="1400" dirty="0"/>
           </a:p>
@@ -12633,7 +12633,7 @@
         </p:nvSpPr>
         <p:spPr>
           <a:xfrm>
-            <a:off x="457200" y="813816"/>
+            <a:off x="457200" y="905256"/>
             <a:ext cx="91440" cy="91440"/>
           </a:xfrm>
           <a:prstGeom prst="rect">
@@ -12653,7 +12653,7 @@
         </p:nvSpPr>
         <p:spPr>
           <a:xfrm>
-            <a:off x="621792" y="713232"/>
+            <a:off x="621792" y="804672"/>
             <a:ext cx="6400800" cy="292608"/>
           </a:xfrm>
           <a:prstGeom prst="rect">
@@ -12692,7 +12692,7 @@
         </p:nvSpPr>
         <p:spPr>
           <a:xfrm>
-            <a:off x="457200" y="987552"/>
+            <a:off x="457200" y="1078992"/>
             <a:ext cx="8229600" cy="640080"/>
           </a:xfrm>
           <a:prstGeom prst="rect">
